--- a/submission/fleetmind-proposal-deck.pptx
+++ b/submission/fleetmind-proposal-deck.pptx
@@ -2713,12 +2713,20 @@
           <a:chExt cx="0" cy="0"/>
         </a:xfrm>
       </p:grpSpPr>
-      <p:sp>
-        <p:nvSpPr>
-          <p:cNvPr id="2" name="Shape 0"/>
-          <p:cNvSpPr/>
-          <p:nvPr/>
-        </p:nvSpPr>
+      <p:pic>
+        <p:nvPicPr>
+          <p:cNvPr id="2" name="Image 0" descr="/Users/fengchihsheng/Documents/AI_work/fleetmind-yang-ming-hackathon/presentation/img/cover-ship-dusk.jpg">    </p:cNvPr>
+          <p:cNvPicPr>
+            <a:picLocks noChangeAspect="1"/>
+          </p:cNvPicPr>
+          <p:nvPr/>
+        </p:nvPicPr>
+        <p:blipFill>
+          <a:blip r:embed="rId1"/>
+          <a:stretch>
+            <a:fillRect/>
+          </a:stretch>
+        </p:blipFill>
         <p:spPr>
           <a:xfrm>
             <a:off x="0" y="0"/>
@@ -2727,15 +2735,33 @@
           <a:prstGeom prst="rect">
             <a:avLst/>
           </a:prstGeom>
+        </p:spPr>
+      </p:pic>
+      <p:sp>
+        <p:nvSpPr>
+          <p:cNvPr id="3" name="Shape 0"/>
+          <p:cNvSpPr/>
+          <p:nvPr/>
+        </p:nvSpPr>
+        <p:spPr>
+          <a:xfrm>
+            <a:off x="0" y="0"/>
+            <a:ext cx="12191695" cy="6858000"/>
+          </a:xfrm>
+          <a:prstGeom prst="rect">
+            <a:avLst/>
+          </a:prstGeom>
           <a:solidFill>
-            <a:srgbClr val="0A2540"/>
+            <a:srgbClr val="0A2540">
+              <a:alpha val="58000"/>
+            </a:srgbClr>
           </a:solidFill>
           <a:ln/>
         </p:spPr>
       </p:sp>
       <p:sp>
         <p:nvSpPr>
-          <p:cNvPr id="3" name="Shape 1"/>
+          <p:cNvPr id="4" name="Shape 1"/>
           <p:cNvSpPr/>
           <p:nvPr/>
         </p:nvSpPr>
@@ -2748,14 +2774,16 @@
             <a:avLst/>
           </a:prstGeom>
           <a:solidFill>
-            <a:srgbClr val="12385C"/>
+            <a:srgbClr val="12385C">
+              <a:alpha val="78000"/>
+            </a:srgbClr>
           </a:solidFill>
           <a:ln/>
         </p:spPr>
       </p:sp>
       <p:sp>
         <p:nvSpPr>
-          <p:cNvPr id="4" name="Text 2"/>
+          <p:cNvPr id="5" name="Text 2"/>
           <p:cNvSpPr/>
           <p:nvPr/>
         </p:nvSpPr>
@@ -2794,7 +2822,7 @@
       </p:sp>
       <p:sp>
         <p:nvSpPr>
-          <p:cNvPr id="5" name="Text 3"/>
+          <p:cNvPr id="6" name="Text 3"/>
           <p:cNvSpPr/>
           <p:nvPr/>
         </p:nvSpPr>
@@ -2856,7 +2884,7 @@
       </p:sp>
       <p:sp>
         <p:nvSpPr>
-          <p:cNvPr id="6" name="Text 4"/>
+          <p:cNvPr id="7" name="Text 4"/>
           <p:cNvSpPr/>
           <p:nvPr/>
         </p:nvSpPr>
@@ -2881,7 +2909,7 @@
             <a:r>
               <a:rPr lang="en-US" sz="1900" dirty="0">
                 <a:solidFill>
-                  <a:srgbClr val="2A9D8F"/>
+                  <a:srgbClr val="6FE7CF"/>
                 </a:solidFill>
                 <a:latin typeface="Hiragino Sans" pitchFamily="34" charset="0"/>
                 <a:ea typeface="Hiragino Sans" pitchFamily="34" charset="-122"/>
@@ -2895,7 +2923,7 @@
       </p:sp>
       <p:sp>
         <p:nvSpPr>
-          <p:cNvPr id="7" name="Text 5"/>
+          <p:cNvPr id="8" name="Text 5"/>
           <p:cNvSpPr/>
           <p:nvPr/>
         </p:nvSpPr>
@@ -2948,7 +2976,7 @@
       </p:sp>
       <p:sp>
         <p:nvSpPr>
-          <p:cNvPr id="8" name="Text 6"/>
+          <p:cNvPr id="9" name="Text 6"/>
           <p:cNvSpPr/>
           <p:nvPr/>
         </p:nvSpPr>
@@ -3856,9 +3884,55 @@
           <a:chExt cx="0" cy="0"/>
         </a:xfrm>
       </p:grpSpPr>
-      <p:sp>
-        <p:nvSpPr>
-          <p:cNvPr id="2" name="Shape 0"/>
+      <p:pic>
+        <p:nvPicPr>
+          <p:cNvPr id="2" name="Image 0" descr="/Users/fengchihsheng/Documents/AI_work/fleetmind-yang-ming-hackathon/presentation/img/horizon-dawn.jpg">    </p:cNvPr>
+          <p:cNvPicPr>
+            <a:picLocks noChangeAspect="1"/>
+          </p:cNvPicPr>
+          <p:nvPr/>
+        </p:nvPicPr>
+        <p:blipFill>
+          <a:blip r:embed="rId1"/>
+          <a:stretch>
+            <a:fillRect/>
+          </a:stretch>
+        </p:blipFill>
+        <p:spPr>
+          <a:xfrm>
+            <a:off x="0" y="0"/>
+            <a:ext cx="12191695" cy="6858000"/>
+          </a:xfrm>
+          <a:prstGeom prst="rect">
+            <a:avLst/>
+          </a:prstGeom>
+        </p:spPr>
+      </p:pic>
+      <p:sp>
+        <p:nvSpPr>
+          <p:cNvPr id="3" name="Shape 0"/>
+          <p:cNvSpPr/>
+          <p:nvPr/>
+        </p:nvSpPr>
+        <p:spPr>
+          <a:xfrm>
+            <a:off x="0" y="0"/>
+            <a:ext cx="12191695" cy="6858000"/>
+          </a:xfrm>
+          <a:prstGeom prst="rect">
+            <a:avLst/>
+          </a:prstGeom>
+          <a:solidFill>
+            <a:srgbClr val="0A2540">
+              <a:alpha val="82000"/>
+            </a:srgbClr>
+          </a:solidFill>
+          <a:ln/>
+        </p:spPr>
+      </p:sp>
+      <p:sp>
+        <p:nvSpPr>
+          <p:cNvPr id="4" name="Shape 1"/>
           <p:cNvSpPr/>
           <p:nvPr/>
         </p:nvSpPr>
@@ -3871,14 +3945,16 @@
             <a:avLst/>
           </a:prstGeom>
           <a:solidFill>
-            <a:srgbClr val="12385C"/>
+            <a:srgbClr val="12385C">
+              <a:alpha val="80000"/>
+            </a:srgbClr>
           </a:solidFill>
           <a:ln/>
         </p:spPr>
       </p:sp>
       <p:sp>
         <p:nvSpPr>
-          <p:cNvPr id="3" name="Text 1"/>
+          <p:cNvPr id="5" name="Text 2"/>
           <p:cNvSpPr/>
           <p:nvPr/>
         </p:nvSpPr>
@@ -3917,7 +3993,7 @@
       </p:sp>
       <p:sp>
         <p:nvSpPr>
-          <p:cNvPr id="4" name="Text 2"/>
+          <p:cNvPr id="6" name="Text 3"/>
           <p:cNvSpPr/>
           <p:nvPr/>
         </p:nvSpPr>
@@ -3979,7 +4055,7 @@
       </p:sp>
       <p:sp>
         <p:nvSpPr>
-          <p:cNvPr id="5" name="Text 3"/>
+          <p:cNvPr id="7" name="Text 4"/>
           <p:cNvSpPr/>
           <p:nvPr/>
         </p:nvSpPr>
@@ -4004,7 +4080,7 @@
             <a:r>
               <a:rPr lang="en-US" sz="1500" b="1" dirty="0">
                 <a:solidFill>
-                  <a:srgbClr val="2A9D8F"/>
+                  <a:srgbClr val="6FE7CF"/>
                 </a:solidFill>
                 <a:latin typeface="Hiragino Sans" pitchFamily="34" charset="0"/>
                 <a:ea typeface="Hiragino Sans" pitchFamily="34" charset="-122"/>
@@ -4018,7 +4094,7 @@
       </p:sp>
       <p:sp>
         <p:nvSpPr>
-          <p:cNvPr id="6" name="Text 4"/>
+          <p:cNvPr id="8" name="Text 5"/>
           <p:cNvSpPr/>
           <p:nvPr/>
         </p:nvSpPr>
@@ -4060,7 +4136,7 @@
       </p:sp>
       <p:sp>
         <p:nvSpPr>
-          <p:cNvPr id="7" name="Text 5"/>
+          <p:cNvPr id="9" name="Text 6"/>
           <p:cNvSpPr/>
           <p:nvPr/>
         </p:nvSpPr>
@@ -4085,7 +4161,7 @@
             <a:r>
               <a:rPr lang="en-US" sz="1500" b="1" dirty="0">
                 <a:solidFill>
-                  <a:srgbClr val="2A9D8F"/>
+                  <a:srgbClr val="6FE7CF"/>
                 </a:solidFill>
                 <a:latin typeface="Hiragino Sans" pitchFamily="34" charset="0"/>
                 <a:ea typeface="Hiragino Sans" pitchFamily="34" charset="-122"/>
@@ -4099,7 +4175,7 @@
       </p:sp>
       <p:sp>
         <p:nvSpPr>
-          <p:cNvPr id="8" name="Text 6"/>
+          <p:cNvPr id="10" name="Text 7"/>
           <p:cNvSpPr/>
           <p:nvPr/>
         </p:nvSpPr>
@@ -4141,7 +4217,7 @@
       </p:sp>
       <p:sp>
         <p:nvSpPr>
-          <p:cNvPr id="9" name="Text 7"/>
+          <p:cNvPr id="11" name="Text 8"/>
           <p:cNvSpPr/>
           <p:nvPr/>
         </p:nvSpPr>
@@ -4166,7 +4242,7 @@
             <a:r>
               <a:rPr lang="en-US" sz="1500" b="1" dirty="0">
                 <a:solidFill>
-                  <a:srgbClr val="2A9D8F"/>
+                  <a:srgbClr val="6FE7CF"/>
                 </a:solidFill>
                 <a:latin typeface="Hiragino Sans" pitchFamily="34" charset="0"/>
                 <a:ea typeface="Hiragino Sans" pitchFamily="34" charset="-122"/>
@@ -4180,7 +4256,7 @@
       </p:sp>
       <p:sp>
         <p:nvSpPr>
-          <p:cNvPr id="10" name="Text 8"/>
+          <p:cNvPr id="12" name="Text 9"/>
           <p:cNvSpPr/>
           <p:nvPr/>
         </p:nvSpPr>
@@ -4222,7 +4298,7 @@
       </p:sp>
       <p:sp>
         <p:nvSpPr>
-          <p:cNvPr id="11" name="Text 9"/>
+          <p:cNvPr id="13" name="Text 10"/>
           <p:cNvSpPr/>
           <p:nvPr/>
         </p:nvSpPr>
@@ -10850,9 +10926,55 @@
           <a:chExt cx="0" cy="0"/>
         </a:xfrm>
       </p:grpSpPr>
-      <p:sp>
-        <p:nvSpPr>
-          <p:cNvPr id="2" name="Text 0"/>
+      <p:pic>
+        <p:nvPicPr>
+          <p:cNvPr id="2" name="Image 0" descr="/Users/fengchihsheng/Documents/AI_work/fleetmind-yang-ming-hackathon/presentation/img/wake-exhaust.jpg">    </p:cNvPr>
+          <p:cNvPicPr>
+            <a:picLocks noChangeAspect="1"/>
+          </p:cNvPicPr>
+          <p:nvPr/>
+        </p:nvPicPr>
+        <p:blipFill>
+          <a:blip r:embed="rId1"/>
+          <a:stretch>
+            <a:fillRect/>
+          </a:stretch>
+        </p:blipFill>
+        <p:spPr>
+          <a:xfrm>
+            <a:off x="0" y="0"/>
+            <a:ext cx="12191695" cy="6858000"/>
+          </a:xfrm>
+          <a:prstGeom prst="rect">
+            <a:avLst/>
+          </a:prstGeom>
+        </p:spPr>
+      </p:pic>
+      <p:sp>
+        <p:nvSpPr>
+          <p:cNvPr id="3" name="Shape 0"/>
+          <p:cNvSpPr/>
+          <p:nvPr/>
+        </p:nvSpPr>
+        <p:spPr>
+          <a:xfrm>
+            <a:off x="0" y="0"/>
+            <a:ext cx="12191695" cy="6858000"/>
+          </a:xfrm>
+          <a:prstGeom prst="rect">
+            <a:avLst/>
+          </a:prstGeom>
+          <a:solidFill>
+            <a:srgbClr val="0A2540">
+              <a:alpha val="78000"/>
+            </a:srgbClr>
+          </a:solidFill>
+          <a:ln/>
+        </p:spPr>
+      </p:sp>
+      <p:sp>
+        <p:nvSpPr>
+          <p:cNvPr id="4" name="Text 1"/>
           <p:cNvSpPr/>
           <p:nvPr/>
         </p:nvSpPr>
@@ -10891,7 +11013,7 @@
       </p:sp>
       <p:sp>
         <p:nvSpPr>
-          <p:cNvPr id="3" name="Text 1"/>
+          <p:cNvPr id="5" name="Text 2"/>
           <p:cNvSpPr/>
           <p:nvPr/>
         </p:nvSpPr>
@@ -10930,7 +11052,7 @@
       </p:sp>
       <p:sp>
         <p:nvSpPr>
-          <p:cNvPr id="4" name="Text 2"/>
+          <p:cNvPr id="6" name="Text 3"/>
           <p:cNvSpPr/>
           <p:nvPr/>
         </p:nvSpPr>
@@ -10969,7 +11091,7 @@
       </p:sp>
       <p:sp>
         <p:nvSpPr>
-          <p:cNvPr id="5" name="Shape 3"/>
+          <p:cNvPr id="7" name="Shape 4"/>
           <p:cNvSpPr/>
           <p:nvPr/>
         </p:nvSpPr>
@@ -10991,7 +11113,7 @@
       </p:sp>
       <p:sp>
         <p:nvSpPr>
-          <p:cNvPr id="6" name="Text 4"/>
+          <p:cNvPr id="8" name="Text 5"/>
           <p:cNvSpPr/>
           <p:nvPr/>
         </p:nvSpPr>
@@ -11030,7 +11152,7 @@
       </p:sp>
       <p:sp>
         <p:nvSpPr>
-          <p:cNvPr id="7" name="Shape 5"/>
+          <p:cNvPr id="9" name="Shape 6"/>
           <p:cNvSpPr/>
           <p:nvPr/>
         </p:nvSpPr>
@@ -11059,7 +11181,7 @@
       </p:sp>
       <p:sp>
         <p:nvSpPr>
-          <p:cNvPr id="8" name="Text 6"/>
+          <p:cNvPr id="10" name="Text 7"/>
           <p:cNvSpPr/>
           <p:nvPr/>
         </p:nvSpPr>
@@ -11084,7 +11206,7 @@
             <a:r>
               <a:rPr lang="en-US" sz="1300" b="1" dirty="0">
                 <a:solidFill>
-                  <a:srgbClr val="2A9D8F"/>
+                  <a:srgbClr val="6FE7CF"/>
                 </a:solidFill>
                 <a:latin typeface="Hiragino Sans" pitchFamily="34" charset="0"/>
                 <a:ea typeface="Hiragino Sans" pitchFamily="34" charset="-122"/>
@@ -11098,7 +11220,7 @@
       </p:sp>
       <p:sp>
         <p:nvSpPr>
-          <p:cNvPr id="9" name="Text 7"/>
+          <p:cNvPr id="11" name="Text 8"/>
           <p:cNvSpPr/>
           <p:nvPr/>
         </p:nvSpPr>
@@ -11123,7 +11245,7 @@
             <a:r>
               <a:rPr lang="en-US" sz="1300" b="1" dirty="0">
                 <a:solidFill>
-                  <a:srgbClr val="2A9D8F"/>
+                  <a:srgbClr val="6FE7CF"/>
                 </a:solidFill>
                 <a:latin typeface="Hiragino Sans" pitchFamily="34" charset="0"/>
                 <a:ea typeface="Hiragino Sans" pitchFamily="34" charset="-122"/>
@@ -11137,7 +11259,7 @@
       </p:sp>
       <p:sp>
         <p:nvSpPr>
-          <p:cNvPr id="10" name="Text 8"/>
+          <p:cNvPr id="12" name="Text 9"/>
           <p:cNvSpPr/>
           <p:nvPr/>
         </p:nvSpPr>
@@ -11162,7 +11284,7 @@
             <a:r>
               <a:rPr lang="en-US" sz="1300" b="1" dirty="0">
                 <a:solidFill>
-                  <a:srgbClr val="2A9D8F"/>
+                  <a:srgbClr val="6FE7CF"/>
                 </a:solidFill>
                 <a:latin typeface="Hiragino Sans" pitchFamily="34" charset="0"/>
                 <a:ea typeface="Hiragino Sans" pitchFamily="34" charset="-122"/>
@@ -11176,7 +11298,7 @@
       </p:sp>
       <p:sp>
         <p:nvSpPr>
-          <p:cNvPr id="11" name="Text 9"/>
+          <p:cNvPr id="13" name="Text 10"/>
           <p:cNvSpPr/>
           <p:nvPr/>
         </p:nvSpPr>
@@ -11201,7 +11323,7 @@
             <a:r>
               <a:rPr lang="en-US" sz="1300" b="1" dirty="0">
                 <a:solidFill>
-                  <a:srgbClr val="2A9D8F"/>
+                  <a:srgbClr val="6FE7CF"/>
                 </a:solidFill>
                 <a:latin typeface="Hiragino Sans" pitchFamily="34" charset="0"/>
                 <a:ea typeface="Hiragino Sans" pitchFamily="34" charset="-122"/>
@@ -11215,7 +11337,7 @@
       </p:sp>
       <p:sp>
         <p:nvSpPr>
-          <p:cNvPr id="12" name="Text 10"/>
+          <p:cNvPr id="14" name="Text 11"/>
           <p:cNvSpPr/>
           <p:nvPr/>
         </p:nvSpPr>
@@ -11254,7 +11376,7 @@
       </p:sp>
       <p:sp>
         <p:nvSpPr>
-          <p:cNvPr id="13" name="Text 11"/>
+          <p:cNvPr id="15" name="Text 12"/>
           <p:cNvSpPr/>
           <p:nvPr/>
         </p:nvSpPr>
@@ -11293,7 +11415,7 @@
       </p:sp>
       <p:sp>
         <p:nvSpPr>
-          <p:cNvPr id="14" name="Text 12"/>
+          <p:cNvPr id="16" name="Text 13"/>
           <p:cNvSpPr/>
           <p:nvPr/>
         </p:nvSpPr>
@@ -11332,7 +11454,7 @@
       </p:sp>
       <p:sp>
         <p:nvSpPr>
-          <p:cNvPr id="15" name="Text 13"/>
+          <p:cNvPr id="17" name="Text 14"/>
           <p:cNvSpPr/>
           <p:nvPr/>
         </p:nvSpPr>
@@ -11371,7 +11493,7 @@
       </p:sp>
       <p:sp>
         <p:nvSpPr>
-          <p:cNvPr id="16" name="Text 14"/>
+          <p:cNvPr id="18" name="Text 15"/>
           <p:cNvSpPr/>
           <p:nvPr/>
         </p:nvSpPr>
@@ -11410,7 +11532,7 @@
       </p:sp>
       <p:sp>
         <p:nvSpPr>
-          <p:cNvPr id="17" name="Text 15"/>
+          <p:cNvPr id="19" name="Text 16"/>
           <p:cNvSpPr/>
           <p:nvPr/>
         </p:nvSpPr>
@@ -11449,7 +11571,7 @@
       </p:sp>
       <p:sp>
         <p:nvSpPr>
-          <p:cNvPr id="18" name="Text 16"/>
+          <p:cNvPr id="20" name="Text 17"/>
           <p:cNvSpPr/>
           <p:nvPr/>
         </p:nvSpPr>
@@ -11488,7 +11610,7 @@
       </p:sp>
       <p:sp>
         <p:nvSpPr>
-          <p:cNvPr id="19" name="Text 17"/>
+          <p:cNvPr id="21" name="Text 18"/>
           <p:cNvSpPr/>
           <p:nvPr/>
         </p:nvSpPr>
@@ -11527,7 +11649,7 @@
       </p:sp>
       <p:sp>
         <p:nvSpPr>
-          <p:cNvPr id="20" name="Text 18"/>
+          <p:cNvPr id="22" name="Text 19"/>
           <p:cNvSpPr/>
           <p:nvPr/>
         </p:nvSpPr>
@@ -11566,7 +11688,7 @@
       </p:sp>
       <p:sp>
         <p:nvSpPr>
-          <p:cNvPr id="21" name="Text 19"/>
+          <p:cNvPr id="23" name="Text 20"/>
           <p:cNvSpPr/>
           <p:nvPr/>
         </p:nvSpPr>
@@ -11605,7 +11727,7 @@
       </p:sp>
       <p:sp>
         <p:nvSpPr>
-          <p:cNvPr id="22" name="Text 20"/>
+          <p:cNvPr id="24" name="Text 21"/>
           <p:cNvSpPr/>
           <p:nvPr/>
         </p:nvSpPr>
@@ -11644,7 +11766,7 @@
       </p:sp>
       <p:sp>
         <p:nvSpPr>
-          <p:cNvPr id="23" name="Text 21"/>
+          <p:cNvPr id="25" name="Text 22"/>
           <p:cNvSpPr/>
           <p:nvPr/>
         </p:nvSpPr>
@@ -11683,7 +11805,7 @@
       </p:sp>
       <p:sp>
         <p:nvSpPr>
-          <p:cNvPr id="24" name="Text 22"/>
+          <p:cNvPr id="26" name="Text 23"/>
           <p:cNvSpPr/>
           <p:nvPr/>
         </p:nvSpPr>

--- a/submission/fleetmind-proposal-deck.pptx
+++ b/submission/fleetmind-proposal-deck.pptx
@@ -122,267 +122,6 @@
 </p:presentation>
 </file>
 
-<file path=ppt/charts/chart1.xml><?xml version="1.0" encoding="utf-8"?>
-<c:chartSpace xmlns:c="http://schemas.openxmlformats.org/drawingml/2006/chart" xmlns:a="http://schemas.openxmlformats.org/drawingml/2006/main" xmlns:r="http://schemas.openxmlformats.org/officeDocument/2006/relationships">
-  <c:date1904 val="0"/>
-  <c:roundedCorners val="1"/>
-  <c:chart>
-    <c:autoTitleDeleted val="1"/>
-    <c:plotArea>
-      <c:layout/>
-      <c:barChart>
-        <c:barDir val="col"/>
-        <c:grouping val="clustered"/>
-        <c:varyColors val="0"/>
-        <c:ser>
-          <c:idx val="0"/>
-          <c:order val="0"/>
-          <c:tx>
-            <c:strRef>
-              <c:f>Sheet1!$B$1</c:f>
-              <c:strCache>
-                <c:ptCount val="1"/>
-                <c:pt idx="0">
-                  <c:v>Speed Loss %</c:v>
-                </c:pt>
-              </c:strCache>
-            </c:strRef>
-          </c:tx>
-          <c:spPr>
-            <a:solidFill>
-              <a:srgbClr val="1C7293"/>
-            </a:solidFill>
-            <a:effectLst/>
-          </c:spPr>
-          <c:invertIfNegative val="0"/>
-          <c:dLbls>
-            <c:numFmt formatCode="0.0&quot;%&quot;" sourceLinked="0"/>
-            <c:txPr>
-              <a:bodyPr/>
-              <a:lstStyle/>
-              <a:p>
-                <a:pPr>
-                  <a:defRPr b="1" i="0" strike="noStrike" sz="1100" u="none">
-                    <a:solidFill>
-                      <a:srgbClr val="18293B"/>
-                    </a:solidFill>
-                    <a:latin typeface="Arial"/>
-                  </a:defRPr>
-                </a:pPr>
-              </a:p>
-            </c:txPr>
-            <c:showLegendKey val="0"/>
-            <c:showVal val="1"/>
-            <c:showCatName val="0"/>
-            <c:showSerName val="0"/>
-            <c:showPercent val="0"/>
-            <c:showBubbleSize val="0"/>
-            <c:showLeaderLines val="0"/>
-          </c:dLbls>
-          <c:cat>
-            <c:multiLvlStrRef>
-              <c:f>Sheet1!$A$2:$A$9</c:f>
-              <c:multiLvlStrCache>
-                <c:ptCount val="8"/>
-                <c:lvl>
-                  <c:pt idx="0">
-                    <c:v>S11</c:v>
-                  </c:pt>
-                  <c:pt idx="1">
-                    <c:v>S23</c:v>
-                  </c:pt>
-                  <c:pt idx="2">
-                    <c:v>S6</c:v>
-                  </c:pt>
-                  <c:pt idx="3">
-                    <c:v>S4</c:v>
-                  </c:pt>
-                  <c:pt idx="4">
-                    <c:v>S12</c:v>
-                  </c:pt>
-                  <c:pt idx="5">
-                    <c:v>S8</c:v>
-                  </c:pt>
-                  <c:pt idx="6">
-                    <c:v>S9</c:v>
-                  </c:pt>
-                  <c:pt idx="7">
-                    <c:v>S5</c:v>
-                  </c:pt>
-                </c:lvl>
-              </c:multiLvlStrCache>
-            </c:multiLvlStrRef>
-          </c:cat>
-          <c:val>
-            <c:numRef>
-              <c:f>Sheet1!$B$2:$B$9</c:f>
-              <c:numCache>
-                <c:formatCode>General</c:formatCode>
-                <c:ptCount val="8"/>
-                <c:pt idx="0">
-                  <c:v>21.8</c:v>
-                </c:pt>
-                <c:pt idx="1">
-                  <c:v>8.9</c:v>
-                </c:pt>
-                <c:pt idx="2">
-                  <c:v>8.8</c:v>
-                </c:pt>
-                <c:pt idx="3">
-                  <c:v>8.7</c:v>
-                </c:pt>
-                <c:pt idx="4">
-                  <c:v>8.4</c:v>
-                </c:pt>
-                <c:pt idx="5">
-                  <c:v>8.4</c:v>
-                </c:pt>
-                <c:pt idx="6">
-                  <c:v>6.4</c:v>
-                </c:pt>
-                <c:pt idx="7">
-                  <c:v>4.3</c:v>
-                </c:pt>
-              </c:numCache>
-            </c:numRef>
-          </c:val>
-        </c:ser>
-        <c:dLbls>
-          <c:numFmt formatCode="0.0&quot;%&quot;" sourceLinked="0"/>
-          <c:txPr>
-            <a:bodyPr/>
-            <a:lstStyle/>
-            <a:p>
-              <a:pPr>
-                <a:defRPr b="1" i="0" strike="noStrike" sz="1100" u="none">
-                  <a:solidFill>
-                    <a:srgbClr val="18293B"/>
-                  </a:solidFill>
-                  <a:latin typeface="Arial"/>
-                </a:defRPr>
-              </a:pPr>
-            </a:p>
-          </c:txPr>
-          <c:showLegendKey val="0"/>
-          <c:showVal val="1"/>
-          <c:showCatName val="0"/>
-          <c:showSerName val="0"/>
-          <c:showPercent val="0"/>
-          <c:showBubbleSize val="0"/>
-          <c:showLeaderLines val="0"/>
-        </c:dLbls>
-        <c:gapWidth val="150"/>
-        <c:overlap val="0"/>
-        <c:axId val="2094734554"/>
-        <c:axId val="2094734552"/>
-        <c:axId val="2094734556"/>
-      </c:barChart>
-      <c:catAx>
-        <c:axId val="2094734554"/>
-        <c:scaling>
-          <c:orientation val="minMax"/>
-        </c:scaling>
-        <c:delete val="0"/>
-        <c:axPos val="b"/>
-        <c:numFmt formatCode="General" sourceLinked="1"/>
-        <c:majorTickMark val="out"/>
-        <c:minorTickMark val="none"/>
-        <c:tickLblPos val="low"/>
-        <c:spPr>
-          <a:ln w="12700" cap="flat">
-            <a:solidFill>
-              <a:srgbClr val="888888"/>
-            </a:solidFill>
-            <a:prstDash val="solid"/>
-            <a:round/>
-          </a:ln>
-        </c:spPr>
-        <c:txPr>
-          <a:bodyPr/>
-          <a:lstStyle/>
-          <a:p>
-            <a:pPr>
-              <a:defRPr sz="1200" b="1" i="0" u="none" strike="noStrike">
-                <a:solidFill>
-                  <a:srgbClr val="18293B"/>
-                </a:solidFill>
-                <a:latin typeface="Arial"/>
-              </a:defRPr>
-            </a:pPr>
-            <a:endParaRPr lang="en-US"/>
-          </a:p>
-        </c:txPr>
-        <c:crossAx val="2094734552"/>
-        <c:crosses val="autoZero"/>
-        <c:auto val="1"/>
-        <c:lblAlgn val="ctr"/>
-        <c:noMultiLvlLbl val="1"/>
-      </c:catAx>
-      <c:valAx>
-        <c:axId val="2094734552"/>
-        <c:scaling>
-          <c:orientation val="minMax"/>
-          <c:max val="25"/>
-          <c:min val="0"/>
-        </c:scaling>
-        <c:delete val="1"/>
-        <c:axPos val="l"/>
-        <c:numFmt formatCode="General" sourceLinked="0"/>
-        <c:majorTickMark val="out"/>
-        <c:minorTickMark val="none"/>
-        <c:tickLblPos val="nextTo"/>
-        <c:spPr>
-          <a:ln w="12700" cap="flat">
-            <a:solidFill>
-              <a:srgbClr val="888888"/>
-            </a:solidFill>
-            <a:prstDash val="solid"/>
-            <a:round/>
-          </a:ln>
-        </c:spPr>
-        <c:txPr>
-          <a:bodyPr/>
-          <a:lstStyle/>
-          <a:p>
-            <a:pPr>
-              <a:defRPr sz="1200" b="0" i="0" u="none" strike="noStrike">
-                <a:solidFill>
-                  <a:srgbClr val="000000"/>
-                </a:solidFill>
-                <a:latin typeface="Arial"/>
-              </a:defRPr>
-            </a:pPr>
-            <a:endParaRPr lang="en-US"/>
-          </a:p>
-        </c:txPr>
-        <c:crossAx val="2094734554"/>
-        <c:crosses val="autoZero"/>
-        <c:crossBetween val="between"/>
-      </c:valAx>
-      <c:spPr>
-        <a:noFill/>
-        <a:ln>
-          <a:noFill/>
-        </a:ln>
-        <a:effectLst/>
-      </c:spPr>
-    </c:plotArea>
-    <c:plotVisOnly val="1"/>
-    <c:dispBlanksAs val="span"/>
-  </c:chart>
-  <c:spPr>
-    <a:noFill/>
-    <a:ln>
-      <a:noFill/>
-    </a:ln>
-    <a:effectLst/>
-  </c:spPr>
-  <c:externalData r:id="rId1">
-    <c:autoUpdate val="0"/>
-  </c:externalData>
-</c:chartSpace>
-</file>
-
 <file path=ppt/notesMasters/notesMaster1.xml><?xml version="1.0" encoding="utf-8"?>
 <p:notesMaster xmlns:a="http://schemas.openxmlformats.org/drawingml/2006/main" xmlns:r="http://schemas.openxmlformats.org/officeDocument/2006/relationships" xmlns:p="http://schemas.openxmlformats.org/presentationml/2006/main">
   <p:cSld>
@@ -997,7 +736,38 @@
  「數字哪來的」 → 直接回 dashboard 點引用，跳回 API
 答不出來時的誠信收尾句：
 「正午報表粒度下這是最誠實的做法；給我們軸功率／對水速度計資料，
- 框架直接升級 ISO 19030 全合規。」</a:t>
+ 框架直接升級 ISO 19030 全合規。」
+════════ 評審 5 項標準 · 上台口頭答法（Q&amp;A 端出這幾段） ════════
+評審資深顧問點名三個弱點：油耗預測講太淺、歸因沒答「為何是船殼不是海流/引擎」、
+AI 太像聊天。下面每段直接可念，結尾都有「給更多資料 → 能做什麼」的鉤子。
+① 互動介面 · Speed Loss
+ 「介面讓工程師逐船、逐航段檢視 Speed Loss；ISO 19030 務實改編，算 k=FOC/STW³，
+  只在 ±1 節同速帶比較，再用 Theil-Sen 抓長期趨勢。加入 AIS、天氣與對水速度，
+  就能更準確校正外部干擾。」
+② 油耗預測模型（最危險，要證明「這是真模型不只是指標」）
+ 「這是真正的 sklearn 預測 pipeline：物理基線 k·STW³ 接 HistGradientBoosting 擇優，
+  納入污損時鐘、船型與燃料熱值，經模擬遮蔽及 GroupKFold 防漏驗證，RMSE 3.51 MT，
+  預測 102 個被遮蔽的格子。**單靠 Noon Report 無法物理拆分原因**，目前僅依 Speed Loss
+  與維修時間關聯推估主因為船殼污損。加入天氣、引擎、螺旋槳檢查與 AIS，
+  就能建立完整油耗歸因模型。」
+③ 未盡之處 · 商業價值
+ 「限制是缺少天氣、海流、引擎感測、扭矩與軸功率，所以結論是可追溯的關聯推估，
+  不冒充物理因果。我們也不虛報金額，只指出 S23 同航速每日多耗約 16.4 MT。
+  補齊營運成本與感測資料，就能支援清洗、維修及船期決策。」
+④ 分析架構 · 演算法（評審問「用什麼算法」）
+ 「架構由確定性 core-calc 打底：同速帶 k 指標、Theil-Sen 趨勢、維修隔離區段歸因，
+  再接 sklearn 預測與 Bedrock 解讀；區段不足時明確標 50/50，不隱藏不確定性。
+  增加高頻感測資料，就能升級為時序模型與多因子因果分析。」
+ 一句話流程：Noon Report → 清洗 → ISO 19030 k → 趨勢偵測 → 決策排序 → Bedrock 摘要。
+⑤ AI 角色（第二危險，定位成 Decision Support 不是 Prediction Engine）
+ 「我們今天不是讓 AI 做判斷，而是讓 AI 幫助工程師更快做判斷。數字全由 core-calc 產生，
+  Claude Haiku 只負責解讀與決策簡報；guardrail 逐項核對來源，對不上就整篇打回，
+  最後由工程師拍板。**FleetMind 核心是 Explainable AI Decision Support，不是 Prediction
+  Engine，更不是 ChatGPT。**」
+三句一定要講：
+ 1「今天不是讓 AI 做判斷，而是讓 AI 幫工程師更快做判斷。」
+ 2「加入 Weather / Engine Sensor / Propeller Inspection / AIS，就能建真正的油耗歸因模型。」
+ 3「核心不是 ChatGPT，是把 ISO19030 + 維修紀錄 + AWS AI 結合成 Explainable Decision Support Platform。」</a:t>
             </a:r>
             <a:endParaRPr lang="en-US" dirty="0"/>
           </a:p>
@@ -9149,25 +8919,816 @@
           </a:p>
         </p:txBody>
       </p:sp>
-      <p:graphicFrame>
-        <p:nvGraphicFramePr>
-          <p:cNvPr id="4" name="Chart 0" descr=""/>
-          <p:cNvGraphicFramePr/>
-          <p:nvPr/>
-        </p:nvGraphicFramePr>
-        <p:xfrm>
-          <a:off x="640080" y="1737360"/>
-          <a:ext cx="6400800" cy="4206240"/>
-        </p:xfrm>
-        <a:graphic xmlns:a="http://schemas.openxmlformats.org/drawingml/2006/main">
-          <a:graphicData uri="http://schemas.openxmlformats.org/drawingml/2006/chart">
-            <c:chart xmlns:c="http://schemas.openxmlformats.org/drawingml/2006/chart" r:id="rId1"/>
-          </a:graphicData>
-        </a:graphic>
-      </p:graphicFrame>
-      <p:sp>
-        <p:nvSpPr>
-          <p:cNvPr id="5" name="Text 2"/>
+      <p:sp>
+        <p:nvSpPr>
+          <p:cNvPr id="4" name="Shape 2"/>
+          <p:cNvSpPr/>
+          <p:nvPr/>
+        </p:nvSpPr>
+        <p:spPr>
+          <a:xfrm>
+            <a:off x="816102" y="2536180"/>
+            <a:ext cx="448056" cy="2950220"/>
+          </a:xfrm>
+          <a:prstGeom prst="rect">
+            <a:avLst/>
+          </a:prstGeom>
+          <a:solidFill>
+            <a:srgbClr val="E76F51"/>
+          </a:solidFill>
+          <a:ln/>
+        </p:spPr>
+      </p:sp>
+      <p:sp>
+        <p:nvSpPr>
+          <p:cNvPr id="5" name="Text 3"/>
+          <p:cNvSpPr/>
+          <p:nvPr/>
+        </p:nvSpPr>
+        <p:spPr>
+          <a:xfrm>
+            <a:off x="633222" y="2188708"/>
+            <a:ext cx="813816" cy="310896"/>
+          </a:xfrm>
+          <a:prstGeom prst="rect">
+            <a:avLst/>
+          </a:prstGeom>
+          <a:noFill/>
+          <a:ln/>
+        </p:spPr>
+        <p:txBody>
+          <a:bodyPr wrap="square" lIns="0" tIns="0" rIns="0" bIns="0" rtlCol="0" anchor="ctr"/>
+          <a:lstStyle/>
+          <a:p>
+            <a:pPr algn="ctr" indent="0" marL="0">
+              <a:buNone/>
+            </a:pPr>
+            <a:r>
+              <a:rPr lang="en-US" sz="1100" b="1" dirty="0">
+                <a:solidFill>
+                  <a:srgbClr val="E76F51"/>
+                </a:solidFill>
+                <a:latin typeface="Hiragino Sans" pitchFamily="34" charset="0"/>
+                <a:ea typeface="Hiragino Sans" pitchFamily="34" charset="-122"/>
+                <a:cs typeface="Hiragino Sans" pitchFamily="34" charset="-120"/>
+              </a:rPr>
+              <a:t>21.8%</a:t>
+            </a:r>
+            <a:endParaRPr lang="en-US" sz="1100" dirty="0"/>
+          </a:p>
+        </p:txBody>
+      </p:sp>
+      <p:sp>
+        <p:nvSpPr>
+          <p:cNvPr id="6" name="Text 4"/>
+          <p:cNvSpPr/>
+          <p:nvPr/>
+        </p:nvSpPr>
+        <p:spPr>
+          <a:xfrm>
+            <a:off x="633222" y="5541264"/>
+            <a:ext cx="813816" cy="310896"/>
+          </a:xfrm>
+          <a:prstGeom prst="rect">
+            <a:avLst/>
+          </a:prstGeom>
+          <a:noFill/>
+          <a:ln/>
+        </p:spPr>
+        <p:txBody>
+          <a:bodyPr wrap="square" lIns="0" tIns="0" rIns="0" bIns="0" rtlCol="0" anchor="ctr"/>
+          <a:lstStyle/>
+          <a:p>
+            <a:pPr algn="ctr" indent="0" marL="0">
+              <a:buNone/>
+            </a:pPr>
+            <a:r>
+              <a:rPr lang="en-US" sz="1200" b="1" dirty="0">
+                <a:solidFill>
+                  <a:srgbClr val="18293B"/>
+                </a:solidFill>
+                <a:latin typeface="Hiragino Sans" pitchFamily="34" charset="0"/>
+                <a:ea typeface="Hiragino Sans" pitchFamily="34" charset="-122"/>
+                <a:cs typeface="Hiragino Sans" pitchFamily="34" charset="-120"/>
+              </a:rPr>
+              <a:t>S11</a:t>
+            </a:r>
+            <a:endParaRPr lang="en-US" sz="1200" dirty="0"/>
+          </a:p>
+        </p:txBody>
+      </p:sp>
+      <p:sp>
+        <p:nvSpPr>
+          <p:cNvPr id="7" name="Shape 5"/>
+          <p:cNvSpPr/>
+          <p:nvPr/>
+        </p:nvSpPr>
+        <p:spPr>
+          <a:xfrm>
+            <a:off x="1616202" y="4281952"/>
+            <a:ext cx="448056" cy="1204448"/>
+          </a:xfrm>
+          <a:prstGeom prst="rect">
+            <a:avLst/>
+          </a:prstGeom>
+          <a:solidFill>
+            <a:srgbClr val="1C7293"/>
+          </a:solidFill>
+          <a:ln/>
+        </p:spPr>
+      </p:sp>
+      <p:sp>
+        <p:nvSpPr>
+          <p:cNvPr id="8" name="Text 6"/>
+          <p:cNvSpPr/>
+          <p:nvPr/>
+        </p:nvSpPr>
+        <p:spPr>
+          <a:xfrm>
+            <a:off x="1433322" y="3934480"/>
+            <a:ext cx="813816" cy="310896"/>
+          </a:xfrm>
+          <a:prstGeom prst="rect">
+            <a:avLst/>
+          </a:prstGeom>
+          <a:noFill/>
+          <a:ln/>
+        </p:spPr>
+        <p:txBody>
+          <a:bodyPr wrap="square" lIns="0" tIns="0" rIns="0" bIns="0" rtlCol="0" anchor="ctr"/>
+          <a:lstStyle/>
+          <a:p>
+            <a:pPr algn="ctr" indent="0" marL="0">
+              <a:buNone/>
+            </a:pPr>
+            <a:r>
+              <a:rPr lang="en-US" sz="1100" b="1" dirty="0">
+                <a:solidFill>
+                  <a:srgbClr val="18293B"/>
+                </a:solidFill>
+                <a:latin typeface="Hiragino Sans" pitchFamily="34" charset="0"/>
+                <a:ea typeface="Hiragino Sans" pitchFamily="34" charset="-122"/>
+                <a:cs typeface="Hiragino Sans" pitchFamily="34" charset="-120"/>
+              </a:rPr>
+              <a:t>8.9%</a:t>
+            </a:r>
+            <a:endParaRPr lang="en-US" sz="1100" dirty="0"/>
+          </a:p>
+        </p:txBody>
+      </p:sp>
+      <p:sp>
+        <p:nvSpPr>
+          <p:cNvPr id="9" name="Text 7"/>
+          <p:cNvSpPr/>
+          <p:nvPr/>
+        </p:nvSpPr>
+        <p:spPr>
+          <a:xfrm>
+            <a:off x="1433322" y="5541264"/>
+            <a:ext cx="813816" cy="310896"/>
+          </a:xfrm>
+          <a:prstGeom prst="rect">
+            <a:avLst/>
+          </a:prstGeom>
+          <a:noFill/>
+          <a:ln/>
+        </p:spPr>
+        <p:txBody>
+          <a:bodyPr wrap="square" lIns="0" tIns="0" rIns="0" bIns="0" rtlCol="0" anchor="ctr"/>
+          <a:lstStyle/>
+          <a:p>
+            <a:pPr algn="ctr" indent="0" marL="0">
+              <a:buNone/>
+            </a:pPr>
+            <a:r>
+              <a:rPr lang="en-US" sz="1200" b="1" dirty="0">
+                <a:solidFill>
+                  <a:srgbClr val="18293B"/>
+                </a:solidFill>
+                <a:latin typeface="Hiragino Sans" pitchFamily="34" charset="0"/>
+                <a:ea typeface="Hiragino Sans" pitchFamily="34" charset="-122"/>
+                <a:cs typeface="Hiragino Sans" pitchFamily="34" charset="-120"/>
+              </a:rPr>
+              <a:t>S23</a:t>
+            </a:r>
+            <a:endParaRPr lang="en-US" sz="1200" dirty="0"/>
+          </a:p>
+        </p:txBody>
+      </p:sp>
+      <p:sp>
+        <p:nvSpPr>
+          <p:cNvPr id="10" name="Shape 8"/>
+          <p:cNvSpPr/>
+          <p:nvPr/>
+        </p:nvSpPr>
+        <p:spPr>
+          <a:xfrm>
+            <a:off x="2416302" y="4295485"/>
+            <a:ext cx="448056" cy="1190915"/>
+          </a:xfrm>
+          <a:prstGeom prst="rect">
+            <a:avLst/>
+          </a:prstGeom>
+          <a:solidFill>
+            <a:srgbClr val="1C7293"/>
+          </a:solidFill>
+          <a:ln/>
+        </p:spPr>
+      </p:sp>
+      <p:sp>
+        <p:nvSpPr>
+          <p:cNvPr id="11" name="Text 9"/>
+          <p:cNvSpPr/>
+          <p:nvPr/>
+        </p:nvSpPr>
+        <p:spPr>
+          <a:xfrm>
+            <a:off x="2233422" y="3948013"/>
+            <a:ext cx="813816" cy="310896"/>
+          </a:xfrm>
+          <a:prstGeom prst="rect">
+            <a:avLst/>
+          </a:prstGeom>
+          <a:noFill/>
+          <a:ln/>
+        </p:spPr>
+        <p:txBody>
+          <a:bodyPr wrap="square" lIns="0" tIns="0" rIns="0" bIns="0" rtlCol="0" anchor="ctr"/>
+          <a:lstStyle/>
+          <a:p>
+            <a:pPr algn="ctr" indent="0" marL="0">
+              <a:buNone/>
+            </a:pPr>
+            <a:r>
+              <a:rPr lang="en-US" sz="1100" b="1" dirty="0">
+                <a:solidFill>
+                  <a:srgbClr val="18293B"/>
+                </a:solidFill>
+                <a:latin typeface="Hiragino Sans" pitchFamily="34" charset="0"/>
+                <a:ea typeface="Hiragino Sans" pitchFamily="34" charset="-122"/>
+                <a:cs typeface="Hiragino Sans" pitchFamily="34" charset="-120"/>
+              </a:rPr>
+              <a:t>8.8%</a:t>
+            </a:r>
+            <a:endParaRPr lang="en-US" sz="1100" dirty="0"/>
+          </a:p>
+        </p:txBody>
+      </p:sp>
+      <p:sp>
+        <p:nvSpPr>
+          <p:cNvPr id="12" name="Text 10"/>
+          <p:cNvSpPr/>
+          <p:nvPr/>
+        </p:nvSpPr>
+        <p:spPr>
+          <a:xfrm>
+            <a:off x="2233422" y="5541264"/>
+            <a:ext cx="813816" cy="310896"/>
+          </a:xfrm>
+          <a:prstGeom prst="rect">
+            <a:avLst/>
+          </a:prstGeom>
+          <a:noFill/>
+          <a:ln/>
+        </p:spPr>
+        <p:txBody>
+          <a:bodyPr wrap="square" lIns="0" tIns="0" rIns="0" bIns="0" rtlCol="0" anchor="ctr"/>
+          <a:lstStyle/>
+          <a:p>
+            <a:pPr algn="ctr" indent="0" marL="0">
+              <a:buNone/>
+            </a:pPr>
+            <a:r>
+              <a:rPr lang="en-US" sz="1200" b="1" dirty="0">
+                <a:solidFill>
+                  <a:srgbClr val="18293B"/>
+                </a:solidFill>
+                <a:latin typeface="Hiragino Sans" pitchFamily="34" charset="0"/>
+                <a:ea typeface="Hiragino Sans" pitchFamily="34" charset="-122"/>
+                <a:cs typeface="Hiragino Sans" pitchFamily="34" charset="-120"/>
+              </a:rPr>
+              <a:t>S6</a:t>
+            </a:r>
+            <a:endParaRPr lang="en-US" sz="1200" dirty="0"/>
+          </a:p>
+        </p:txBody>
+      </p:sp>
+      <p:sp>
+        <p:nvSpPr>
+          <p:cNvPr id="13" name="Shape 11"/>
+          <p:cNvSpPr/>
+          <p:nvPr/>
+        </p:nvSpPr>
+        <p:spPr>
+          <a:xfrm>
+            <a:off x="3216402" y="4309019"/>
+            <a:ext cx="448056" cy="1177381"/>
+          </a:xfrm>
+          <a:prstGeom prst="rect">
+            <a:avLst/>
+          </a:prstGeom>
+          <a:solidFill>
+            <a:srgbClr val="1C7293"/>
+          </a:solidFill>
+          <a:ln/>
+        </p:spPr>
+      </p:sp>
+      <p:sp>
+        <p:nvSpPr>
+          <p:cNvPr id="14" name="Text 12"/>
+          <p:cNvSpPr/>
+          <p:nvPr/>
+        </p:nvSpPr>
+        <p:spPr>
+          <a:xfrm>
+            <a:off x="3033522" y="3961547"/>
+            <a:ext cx="813816" cy="310896"/>
+          </a:xfrm>
+          <a:prstGeom prst="rect">
+            <a:avLst/>
+          </a:prstGeom>
+          <a:noFill/>
+          <a:ln/>
+        </p:spPr>
+        <p:txBody>
+          <a:bodyPr wrap="square" lIns="0" tIns="0" rIns="0" bIns="0" rtlCol="0" anchor="ctr"/>
+          <a:lstStyle/>
+          <a:p>
+            <a:pPr algn="ctr" indent="0" marL="0">
+              <a:buNone/>
+            </a:pPr>
+            <a:r>
+              <a:rPr lang="en-US" sz="1100" b="1" dirty="0">
+                <a:solidFill>
+                  <a:srgbClr val="18293B"/>
+                </a:solidFill>
+                <a:latin typeface="Hiragino Sans" pitchFamily="34" charset="0"/>
+                <a:ea typeface="Hiragino Sans" pitchFamily="34" charset="-122"/>
+                <a:cs typeface="Hiragino Sans" pitchFamily="34" charset="-120"/>
+              </a:rPr>
+              <a:t>8.7%</a:t>
+            </a:r>
+            <a:endParaRPr lang="en-US" sz="1100" dirty="0"/>
+          </a:p>
+        </p:txBody>
+      </p:sp>
+      <p:sp>
+        <p:nvSpPr>
+          <p:cNvPr id="15" name="Text 13"/>
+          <p:cNvSpPr/>
+          <p:nvPr/>
+        </p:nvSpPr>
+        <p:spPr>
+          <a:xfrm>
+            <a:off x="3033522" y="5541264"/>
+            <a:ext cx="813816" cy="310896"/>
+          </a:xfrm>
+          <a:prstGeom prst="rect">
+            <a:avLst/>
+          </a:prstGeom>
+          <a:noFill/>
+          <a:ln/>
+        </p:spPr>
+        <p:txBody>
+          <a:bodyPr wrap="square" lIns="0" tIns="0" rIns="0" bIns="0" rtlCol="0" anchor="ctr"/>
+          <a:lstStyle/>
+          <a:p>
+            <a:pPr algn="ctr" indent="0" marL="0">
+              <a:buNone/>
+            </a:pPr>
+            <a:r>
+              <a:rPr lang="en-US" sz="1200" b="1" dirty="0">
+                <a:solidFill>
+                  <a:srgbClr val="18293B"/>
+                </a:solidFill>
+                <a:latin typeface="Hiragino Sans" pitchFamily="34" charset="0"/>
+                <a:ea typeface="Hiragino Sans" pitchFamily="34" charset="-122"/>
+                <a:cs typeface="Hiragino Sans" pitchFamily="34" charset="-120"/>
+              </a:rPr>
+              <a:t>S4</a:t>
+            </a:r>
+            <a:endParaRPr lang="en-US" sz="1200" dirty="0"/>
+          </a:p>
+        </p:txBody>
+      </p:sp>
+      <p:sp>
+        <p:nvSpPr>
+          <p:cNvPr id="16" name="Shape 14"/>
+          <p:cNvSpPr/>
+          <p:nvPr/>
+        </p:nvSpPr>
+        <p:spPr>
+          <a:xfrm>
+            <a:off x="4016502" y="4349618"/>
+            <a:ext cx="448056" cy="1136782"/>
+          </a:xfrm>
+          <a:prstGeom prst="rect">
+            <a:avLst/>
+          </a:prstGeom>
+          <a:solidFill>
+            <a:srgbClr val="1C7293"/>
+          </a:solidFill>
+          <a:ln/>
+        </p:spPr>
+      </p:sp>
+      <p:sp>
+        <p:nvSpPr>
+          <p:cNvPr id="17" name="Text 15"/>
+          <p:cNvSpPr/>
+          <p:nvPr/>
+        </p:nvSpPr>
+        <p:spPr>
+          <a:xfrm>
+            <a:off x="3833622" y="4002146"/>
+            <a:ext cx="813816" cy="310896"/>
+          </a:xfrm>
+          <a:prstGeom prst="rect">
+            <a:avLst/>
+          </a:prstGeom>
+          <a:noFill/>
+          <a:ln/>
+        </p:spPr>
+        <p:txBody>
+          <a:bodyPr wrap="square" lIns="0" tIns="0" rIns="0" bIns="0" rtlCol="0" anchor="ctr"/>
+          <a:lstStyle/>
+          <a:p>
+            <a:pPr algn="ctr" indent="0" marL="0">
+              <a:buNone/>
+            </a:pPr>
+            <a:r>
+              <a:rPr lang="en-US" sz="1100" b="1" dirty="0">
+                <a:solidFill>
+                  <a:srgbClr val="18293B"/>
+                </a:solidFill>
+                <a:latin typeface="Hiragino Sans" pitchFamily="34" charset="0"/>
+                <a:ea typeface="Hiragino Sans" pitchFamily="34" charset="-122"/>
+                <a:cs typeface="Hiragino Sans" pitchFamily="34" charset="-120"/>
+              </a:rPr>
+              <a:t>8.4%</a:t>
+            </a:r>
+            <a:endParaRPr lang="en-US" sz="1100" dirty="0"/>
+          </a:p>
+        </p:txBody>
+      </p:sp>
+      <p:sp>
+        <p:nvSpPr>
+          <p:cNvPr id="18" name="Text 16"/>
+          <p:cNvSpPr/>
+          <p:nvPr/>
+        </p:nvSpPr>
+        <p:spPr>
+          <a:xfrm>
+            <a:off x="3833622" y="5541264"/>
+            <a:ext cx="813816" cy="310896"/>
+          </a:xfrm>
+          <a:prstGeom prst="rect">
+            <a:avLst/>
+          </a:prstGeom>
+          <a:noFill/>
+          <a:ln/>
+        </p:spPr>
+        <p:txBody>
+          <a:bodyPr wrap="square" lIns="0" tIns="0" rIns="0" bIns="0" rtlCol="0" anchor="ctr"/>
+          <a:lstStyle/>
+          <a:p>
+            <a:pPr algn="ctr" indent="0" marL="0">
+              <a:buNone/>
+            </a:pPr>
+            <a:r>
+              <a:rPr lang="en-US" sz="1200" b="1" dirty="0">
+                <a:solidFill>
+                  <a:srgbClr val="18293B"/>
+                </a:solidFill>
+                <a:latin typeface="Hiragino Sans" pitchFamily="34" charset="0"/>
+                <a:ea typeface="Hiragino Sans" pitchFamily="34" charset="-122"/>
+                <a:cs typeface="Hiragino Sans" pitchFamily="34" charset="-120"/>
+              </a:rPr>
+              <a:t>S12</a:t>
+            </a:r>
+            <a:endParaRPr lang="en-US" sz="1200" dirty="0"/>
+          </a:p>
+        </p:txBody>
+      </p:sp>
+      <p:sp>
+        <p:nvSpPr>
+          <p:cNvPr id="19" name="Shape 17"/>
+          <p:cNvSpPr/>
+          <p:nvPr/>
+        </p:nvSpPr>
+        <p:spPr>
+          <a:xfrm>
+            <a:off x="4816602" y="4349618"/>
+            <a:ext cx="448056" cy="1136782"/>
+          </a:xfrm>
+          <a:prstGeom prst="rect">
+            <a:avLst/>
+          </a:prstGeom>
+          <a:solidFill>
+            <a:srgbClr val="1C7293"/>
+          </a:solidFill>
+          <a:ln/>
+        </p:spPr>
+      </p:sp>
+      <p:sp>
+        <p:nvSpPr>
+          <p:cNvPr id="20" name="Text 18"/>
+          <p:cNvSpPr/>
+          <p:nvPr/>
+        </p:nvSpPr>
+        <p:spPr>
+          <a:xfrm>
+            <a:off x="4633722" y="4002146"/>
+            <a:ext cx="813816" cy="310896"/>
+          </a:xfrm>
+          <a:prstGeom prst="rect">
+            <a:avLst/>
+          </a:prstGeom>
+          <a:noFill/>
+          <a:ln/>
+        </p:spPr>
+        <p:txBody>
+          <a:bodyPr wrap="square" lIns="0" tIns="0" rIns="0" bIns="0" rtlCol="0" anchor="ctr"/>
+          <a:lstStyle/>
+          <a:p>
+            <a:pPr algn="ctr" indent="0" marL="0">
+              <a:buNone/>
+            </a:pPr>
+            <a:r>
+              <a:rPr lang="en-US" sz="1100" b="1" dirty="0">
+                <a:solidFill>
+                  <a:srgbClr val="18293B"/>
+                </a:solidFill>
+                <a:latin typeface="Hiragino Sans" pitchFamily="34" charset="0"/>
+                <a:ea typeface="Hiragino Sans" pitchFamily="34" charset="-122"/>
+                <a:cs typeface="Hiragino Sans" pitchFamily="34" charset="-120"/>
+              </a:rPr>
+              <a:t>8.4%</a:t>
+            </a:r>
+            <a:endParaRPr lang="en-US" sz="1100" dirty="0"/>
+          </a:p>
+        </p:txBody>
+      </p:sp>
+      <p:sp>
+        <p:nvSpPr>
+          <p:cNvPr id="21" name="Text 19"/>
+          <p:cNvSpPr/>
+          <p:nvPr/>
+        </p:nvSpPr>
+        <p:spPr>
+          <a:xfrm>
+            <a:off x="4633722" y="5541264"/>
+            <a:ext cx="813816" cy="310896"/>
+          </a:xfrm>
+          <a:prstGeom prst="rect">
+            <a:avLst/>
+          </a:prstGeom>
+          <a:noFill/>
+          <a:ln/>
+        </p:spPr>
+        <p:txBody>
+          <a:bodyPr wrap="square" lIns="0" tIns="0" rIns="0" bIns="0" rtlCol="0" anchor="ctr"/>
+          <a:lstStyle/>
+          <a:p>
+            <a:pPr algn="ctr" indent="0" marL="0">
+              <a:buNone/>
+            </a:pPr>
+            <a:r>
+              <a:rPr lang="en-US" sz="1200" b="1" dirty="0">
+                <a:solidFill>
+                  <a:srgbClr val="18293B"/>
+                </a:solidFill>
+                <a:latin typeface="Hiragino Sans" pitchFamily="34" charset="0"/>
+                <a:ea typeface="Hiragino Sans" pitchFamily="34" charset="-122"/>
+                <a:cs typeface="Hiragino Sans" pitchFamily="34" charset="-120"/>
+              </a:rPr>
+              <a:t>S8</a:t>
+            </a:r>
+            <a:endParaRPr lang="en-US" sz="1200" dirty="0"/>
+          </a:p>
+        </p:txBody>
+      </p:sp>
+      <p:sp>
+        <p:nvSpPr>
+          <p:cNvPr id="22" name="Shape 20"/>
+          <p:cNvSpPr/>
+          <p:nvPr/>
+        </p:nvSpPr>
+        <p:spPr>
+          <a:xfrm>
+            <a:off x="5616702" y="4620280"/>
+            <a:ext cx="448056" cy="866120"/>
+          </a:xfrm>
+          <a:prstGeom prst="rect">
+            <a:avLst/>
+          </a:prstGeom>
+          <a:solidFill>
+            <a:srgbClr val="1C7293"/>
+          </a:solidFill>
+          <a:ln/>
+        </p:spPr>
+      </p:sp>
+      <p:sp>
+        <p:nvSpPr>
+          <p:cNvPr id="23" name="Text 21"/>
+          <p:cNvSpPr/>
+          <p:nvPr/>
+        </p:nvSpPr>
+        <p:spPr>
+          <a:xfrm>
+            <a:off x="5433822" y="4272808"/>
+            <a:ext cx="813816" cy="310896"/>
+          </a:xfrm>
+          <a:prstGeom prst="rect">
+            <a:avLst/>
+          </a:prstGeom>
+          <a:noFill/>
+          <a:ln/>
+        </p:spPr>
+        <p:txBody>
+          <a:bodyPr wrap="square" lIns="0" tIns="0" rIns="0" bIns="0" rtlCol="0" anchor="ctr"/>
+          <a:lstStyle/>
+          <a:p>
+            <a:pPr algn="ctr" indent="0" marL="0">
+              <a:buNone/>
+            </a:pPr>
+            <a:r>
+              <a:rPr lang="en-US" sz="1100" b="1" dirty="0">
+                <a:solidFill>
+                  <a:srgbClr val="18293B"/>
+                </a:solidFill>
+                <a:latin typeface="Hiragino Sans" pitchFamily="34" charset="0"/>
+                <a:ea typeface="Hiragino Sans" pitchFamily="34" charset="-122"/>
+                <a:cs typeface="Hiragino Sans" pitchFamily="34" charset="-120"/>
+              </a:rPr>
+              <a:t>6.4%</a:t>
+            </a:r>
+            <a:endParaRPr lang="en-US" sz="1100" dirty="0"/>
+          </a:p>
+        </p:txBody>
+      </p:sp>
+      <p:sp>
+        <p:nvSpPr>
+          <p:cNvPr id="24" name="Text 22"/>
+          <p:cNvSpPr/>
+          <p:nvPr/>
+        </p:nvSpPr>
+        <p:spPr>
+          <a:xfrm>
+            <a:off x="5433822" y="5541264"/>
+            <a:ext cx="813816" cy="310896"/>
+          </a:xfrm>
+          <a:prstGeom prst="rect">
+            <a:avLst/>
+          </a:prstGeom>
+          <a:noFill/>
+          <a:ln/>
+        </p:spPr>
+        <p:txBody>
+          <a:bodyPr wrap="square" lIns="0" tIns="0" rIns="0" bIns="0" rtlCol="0" anchor="ctr"/>
+          <a:lstStyle/>
+          <a:p>
+            <a:pPr algn="ctr" indent="0" marL="0">
+              <a:buNone/>
+            </a:pPr>
+            <a:r>
+              <a:rPr lang="en-US" sz="1200" b="1" dirty="0">
+                <a:solidFill>
+                  <a:srgbClr val="18293B"/>
+                </a:solidFill>
+                <a:latin typeface="Hiragino Sans" pitchFamily="34" charset="0"/>
+                <a:ea typeface="Hiragino Sans" pitchFamily="34" charset="-122"/>
+                <a:cs typeface="Hiragino Sans" pitchFamily="34" charset="-120"/>
+              </a:rPr>
+              <a:t>S9</a:t>
+            </a:r>
+            <a:endParaRPr lang="en-US" sz="1200" dirty="0"/>
+          </a:p>
+        </p:txBody>
+      </p:sp>
+      <p:sp>
+        <p:nvSpPr>
+          <p:cNvPr id="25" name="Shape 23"/>
+          <p:cNvSpPr/>
+          <p:nvPr/>
+        </p:nvSpPr>
+        <p:spPr>
+          <a:xfrm>
+            <a:off x="6416802" y="4904476"/>
+            <a:ext cx="448056" cy="581924"/>
+          </a:xfrm>
+          <a:prstGeom prst="rect">
+            <a:avLst/>
+          </a:prstGeom>
+          <a:solidFill>
+            <a:srgbClr val="1C7293"/>
+          </a:solidFill>
+          <a:ln/>
+        </p:spPr>
+      </p:sp>
+      <p:sp>
+        <p:nvSpPr>
+          <p:cNvPr id="26" name="Text 24"/>
+          <p:cNvSpPr/>
+          <p:nvPr/>
+        </p:nvSpPr>
+        <p:spPr>
+          <a:xfrm>
+            <a:off x="6233922" y="4557004"/>
+            <a:ext cx="813816" cy="310896"/>
+          </a:xfrm>
+          <a:prstGeom prst="rect">
+            <a:avLst/>
+          </a:prstGeom>
+          <a:noFill/>
+          <a:ln/>
+        </p:spPr>
+        <p:txBody>
+          <a:bodyPr wrap="square" lIns="0" tIns="0" rIns="0" bIns="0" rtlCol="0" anchor="ctr"/>
+          <a:lstStyle/>
+          <a:p>
+            <a:pPr algn="ctr" indent="0" marL="0">
+              <a:buNone/>
+            </a:pPr>
+            <a:r>
+              <a:rPr lang="en-US" sz="1100" b="1" dirty="0">
+                <a:solidFill>
+                  <a:srgbClr val="18293B"/>
+                </a:solidFill>
+                <a:latin typeface="Hiragino Sans" pitchFamily="34" charset="0"/>
+                <a:ea typeface="Hiragino Sans" pitchFamily="34" charset="-122"/>
+                <a:cs typeface="Hiragino Sans" pitchFamily="34" charset="-120"/>
+              </a:rPr>
+              <a:t>4.3%</a:t>
+            </a:r>
+            <a:endParaRPr lang="en-US" sz="1100" dirty="0"/>
+          </a:p>
+        </p:txBody>
+      </p:sp>
+      <p:sp>
+        <p:nvSpPr>
+          <p:cNvPr id="27" name="Text 25"/>
+          <p:cNvSpPr/>
+          <p:nvPr/>
+        </p:nvSpPr>
+        <p:spPr>
+          <a:xfrm>
+            <a:off x="6233922" y="5541264"/>
+            <a:ext cx="813816" cy="310896"/>
+          </a:xfrm>
+          <a:prstGeom prst="rect">
+            <a:avLst/>
+          </a:prstGeom>
+          <a:noFill/>
+          <a:ln/>
+        </p:spPr>
+        <p:txBody>
+          <a:bodyPr wrap="square" lIns="0" tIns="0" rIns="0" bIns="0" rtlCol="0" anchor="ctr"/>
+          <a:lstStyle/>
+          <a:p>
+            <a:pPr algn="ctr" indent="0" marL="0">
+              <a:buNone/>
+            </a:pPr>
+            <a:r>
+              <a:rPr lang="en-US" sz="1200" b="1" dirty="0">
+                <a:solidFill>
+                  <a:srgbClr val="18293B"/>
+                </a:solidFill>
+                <a:latin typeface="Hiragino Sans" pitchFamily="34" charset="0"/>
+                <a:ea typeface="Hiragino Sans" pitchFamily="34" charset="-122"/>
+                <a:cs typeface="Hiragino Sans" pitchFamily="34" charset="-120"/>
+              </a:rPr>
+              <a:t>S5</a:t>
+            </a:r>
+            <a:endParaRPr lang="en-US" sz="1200" dirty="0"/>
+          </a:p>
+        </p:txBody>
+      </p:sp>
+      <p:sp>
+        <p:nvSpPr>
+          <p:cNvPr id="28" name="Shape 26"/>
+          <p:cNvSpPr/>
+          <p:nvPr/>
+        </p:nvSpPr>
+        <p:spPr>
+          <a:xfrm>
+            <a:off x="640080" y="5486400"/>
+            <a:ext cx="6400800" cy="0"/>
+          </a:xfrm>
+          <a:prstGeom prst="line">
+            <a:avLst/>
+          </a:prstGeom>
+          <a:noFill/>
+          <a:ln w="12700">
+            <a:solidFill>
+              <a:srgbClr val="CBD8E2"/>
+            </a:solidFill>
+            <a:prstDash val="solid"/>
+          </a:ln>
+        </p:spPr>
+      </p:sp>
+      <p:sp>
+        <p:nvSpPr>
+          <p:cNvPr id="29" name="Text 27"/>
           <p:cNvSpPr/>
           <p:nvPr/>
         </p:nvSpPr>
@@ -9206,7 +9767,7 @@
       </p:sp>
       <p:sp>
         <p:nvSpPr>
-          <p:cNvPr id="6" name="Shape 3"/>
+          <p:cNvPr id="30" name="Shape 28"/>
           <p:cNvSpPr/>
           <p:nvPr/>
         </p:nvSpPr>
@@ -9235,7 +9796,7 @@
       </p:sp>
       <p:sp>
         <p:nvSpPr>
-          <p:cNvPr id="7" name="Text 4"/>
+          <p:cNvPr id="31" name="Text 29"/>
           <p:cNvSpPr/>
           <p:nvPr/>
         </p:nvSpPr>
@@ -9274,7 +9835,7 @@
       </p:sp>
       <p:sp>
         <p:nvSpPr>
-          <p:cNvPr id="8" name="Text 5"/>
+          <p:cNvPr id="32" name="Text 30"/>
           <p:cNvSpPr/>
           <p:nvPr/>
         </p:nvSpPr>
@@ -9316,7 +9877,7 @@
       </p:sp>
       <p:sp>
         <p:nvSpPr>
-          <p:cNvPr id="9" name="Text 6"/>
+          <p:cNvPr id="33" name="Text 31"/>
           <p:cNvSpPr/>
           <p:nvPr/>
         </p:nvSpPr>
@@ -9355,7 +9916,7 @@
       </p:sp>
       <p:sp>
         <p:nvSpPr>
-          <p:cNvPr id="10" name="Text 7"/>
+          <p:cNvPr id="34" name="Text 32"/>
           <p:cNvSpPr/>
           <p:nvPr/>
         </p:nvSpPr>
@@ -9397,7 +9958,7 @@
       </p:sp>
       <p:sp>
         <p:nvSpPr>
-          <p:cNvPr id="11" name="Text 8"/>
+          <p:cNvPr id="35" name="Text 33"/>
           <p:cNvSpPr/>
           <p:nvPr/>
         </p:nvSpPr>
@@ -9436,7 +9997,7 @@
       </p:sp>
       <p:sp>
         <p:nvSpPr>
-          <p:cNvPr id="12" name="Text 9"/>
+          <p:cNvPr id="36" name="Text 34"/>
           <p:cNvSpPr/>
           <p:nvPr/>
         </p:nvSpPr>
@@ -9478,7 +10039,7 @@
       </p:sp>
       <p:sp>
         <p:nvSpPr>
-          <p:cNvPr id="13" name="Text 10"/>
+          <p:cNvPr id="37" name="Text 35"/>
           <p:cNvSpPr/>
           <p:nvPr/>
         </p:nvSpPr>
@@ -9517,7 +10078,7 @@
       </p:sp>
       <p:sp>
         <p:nvSpPr>
-          <p:cNvPr id="14" name="Text 11"/>
+          <p:cNvPr id="38" name="Text 36"/>
           <p:cNvSpPr/>
           <p:nvPr/>
         </p:nvSpPr>

--- a/submission/fleetmind-proposal-deck.pptx
+++ b/submission/fleetmind-proposal-deck.pptx
@@ -3543,7 +3543,7 @@
               <a:buNone/>
             </a:pPr>
             <a:r>
-              <a:rPr lang="en-US" sz="1600" b="1" dirty="0">
+              <a:rPr lang="en-US" sz="1500" b="1" dirty="0">
                 <a:solidFill>
                   <a:srgbClr val="0A2540"/>
                 </a:solidFill>
@@ -3551,9 +3551,37 @@
                 <a:ea typeface="Hiragino Sans" pitchFamily="34" charset="-122"/>
                 <a:cs typeface="Hiragino Sans" pitchFamily="34" charset="-120"/>
               </a:rPr>
-              <a:t>AI 的角色：數字來自計算，語言來自 AI，決策留給人</a:t>
-            </a:r>
-            <a:endParaRPr lang="en-US" sz="1600" dirty="0"/>
+              <a:t>AI 定位：Explainable Decision Support</a:t>
+            </a:r>
+            <a:pPr indent="0" marL="0">
+              <a:buNone/>
+            </a:pPr>
+            <a:r>
+              <a:rPr lang="en-US" sz="1500" b="1" dirty="0">
+                <a:solidFill>
+                  <a:srgbClr val="E76F51"/>
+                </a:solidFill>
+                <a:latin typeface="Hiragino Sans" pitchFamily="34" charset="0"/>
+                <a:ea typeface="Hiragino Sans" pitchFamily="34" charset="-122"/>
+                <a:cs typeface="Hiragino Sans" pitchFamily="34" charset="-120"/>
+              </a:rPr>
+              <a:t>，不是 Prediction Engine</a:t>
+            </a:r>
+            <a:pPr indent="0" marL="0">
+              <a:buNone/>
+            </a:pPr>
+            <a:r>
+              <a:rPr lang="en-US" sz="1500" b="1" dirty="0">
+                <a:solidFill>
+                  <a:srgbClr val="0A2540"/>
+                </a:solidFill>
+                <a:latin typeface="Hiragino Sans" pitchFamily="34" charset="0"/>
+                <a:ea typeface="Hiragino Sans" pitchFamily="34" charset="-122"/>
+                <a:cs typeface="Hiragino Sans" pitchFamily="34" charset="-120"/>
+              </a:rPr>
+              <a:t> —— 數字來自計算，語言來自 AI，工程師拍板。</a:t>
+            </a:r>
+            <a:endParaRPr lang="en-US" sz="1500" dirty="0"/>
           </a:p>
         </p:txBody>
       </p:sp>
@@ -10444,8 +10472,8 @@
         </p:nvSpPr>
         <p:spPr>
           <a:xfrm>
-            <a:off x="960120" y="4754880"/>
-            <a:ext cx="4480560" cy="914400"/>
+            <a:off x="960120" y="4572000"/>
+            <a:ext cx="4526280" cy="1417320"/>
           </a:xfrm>
           <a:prstGeom prst="rect">
             <a:avLst/>
@@ -10459,12 +10487,38 @@
           <a:p>
             <a:pPr indent="0" marL="0">
               <a:lnSpc>
-                <a:spcPct val="112000"/>
+                <a:spcPct val="114000"/>
               </a:lnSpc>
-              <a:buNone/>
-            </a:pPr>
-            <a:r>
-              <a:rPr lang="en-US" sz="1100" dirty="0">
+              <a:spcAft>
+                <a:spcPts val="300"/>
+              </a:spcAft>
+              <a:buNone/>
+            </a:pPr>
+            <a:r>
+              <a:rPr lang="en-US" sz="1050" b="1" dirty="0">
+                <a:solidFill>
+                  <a:srgbClr val="F4A72B"/>
+                </a:solidFill>
+                <a:latin typeface="Hiragino Sans" pitchFamily="34" charset="0"/>
+                <a:ea typeface="Hiragino Sans" pitchFamily="34" charset="-122"/>
+                <a:cs typeface="Hiragino Sans" pitchFamily="34" charset="-120"/>
+              </a:rPr>
+              <a:t>為何歸因船殼？</a:t>
+            </a:r>
+            <a:endParaRPr lang="en-US" sz="1050" dirty="0"/>
+          </a:p>
+          <a:p>
+            <a:pPr indent="0" marL="0">
+              <a:lnSpc>
+                <a:spcPct val="114000"/>
+              </a:lnSpc>
+              <a:spcAft>
+                <a:spcPts val="300"/>
+              </a:spcAft>
+              <a:buNone/>
+            </a:pPr>
+            <a:r>
+              <a:rPr lang="en-US" sz="1050" dirty="0">
                 <a:solidFill>
                   <a:srgbClr val="8FA8BD"/>
                 </a:solidFill>
@@ -10472,9 +10526,29 @@
                 <a:ea typeface="Hiragino Sans" pitchFamily="34" charset="-122"/>
                 <a:cs typeface="Hiragino Sans" pitchFamily="34" charset="-120"/>
               </a:rPr>
-              <a:t>方法：以隔離區段（只影響螺旋槳 / 只影響船殼的窗口）各自量 k 漂移率拆分；區段稀疏時退回標記過的 50/50，不假裝精準。</a:t>
-            </a:r>
-            <a:endParaRPr lang="en-US" sz="1100" dirty="0"/>
+              <a:t>單靠 Noon Report 無法物理拆分海流／天氣／引擎老化；我們以 Speed Loss 與維修事件的時間關聯推估主因，並用隔離區段量 k 漂移率拆船殼／螺旋槳（區段稀疏時退回標記過的 50/50，不假裝精準）。</a:t>
+            </a:r>
+            <a:endParaRPr lang="en-US" sz="1050" dirty="0"/>
+          </a:p>
+          <a:p>
+            <a:pPr indent="0" marL="0">
+              <a:lnSpc>
+                <a:spcPct val="114000"/>
+              </a:lnSpc>
+              <a:buNone/>
+            </a:pPr>
+            <a:r>
+              <a:rPr lang="en-US" sz="1050" dirty="0">
+                <a:solidFill>
+                  <a:srgbClr val="2A9D8F"/>
+                </a:solidFill>
+                <a:latin typeface="Hiragino Sans" pitchFamily="34" charset="0"/>
+                <a:ea typeface="Hiragino Sans" pitchFamily="34" charset="-122"/>
+                <a:cs typeface="Hiragino Sans" pitchFamily="34" charset="-120"/>
+              </a:rPr>
+              <a:t>給更多感測資料（天氣／扭矩／軸功率）→ 可升級為真正的 Attribution Model。</a:t>
+            </a:r>
+            <a:endParaRPr lang="en-US" sz="1050" dirty="0"/>
           </a:p>
         </p:txBody>
       </p:sp>
